--- a/ANALYTICA_MOLES_JEI AKASH.pptx
+++ b/ANALYTICA_MOLES_JEI AKASH.pptx
@@ -2,7 +2,7 @@
 <file path=ppt/presentation.xml><?xml version="1.0" encoding="utf-8"?>
 <p:presentation xmlns:a="http://schemas.openxmlformats.org/drawingml/2006/main" xmlns:r="http://schemas.openxmlformats.org/officeDocument/2006/relationships" xmlns:p="http://schemas.openxmlformats.org/presentationml/2006/main" saveSubsetFonts="1">
   <p:sldMasterIdLst>
-    <p:sldMasterId id="2147483648" r:id="rId1"/>
+    <p:sldMasterId id="2147483678" r:id="rId1"/>
   </p:sldMasterIdLst>
   <p:sldIdLst>
     <p:sldId id="256" r:id="rId2"/>
@@ -140,7 +140,7 @@
           <p:cNvPr id="2" name="Title 1">
             <a:extLst>
               <a:ext uri="{FF2B5EF4-FFF2-40B4-BE49-F238E27FC236}">
-                <a16:creationId xmlns:a16="http://schemas.microsoft.com/office/drawing/2014/main" id="{751907AF-5C0C-456B-AEF2-4649A42DC316}"/>
+                <a16:creationId xmlns:a16="http://schemas.microsoft.com/office/drawing/2014/main" id="{F026970A-4E20-4119-8B59-C88EA4377A37}"/>
               </a:ext>
             </a:extLst>
           </p:cNvPr>
@@ -178,7 +178,7 @@
           <p:cNvPr id="3" name="Subtitle 2">
             <a:extLst>
               <a:ext uri="{FF2B5EF4-FFF2-40B4-BE49-F238E27FC236}">
-                <a16:creationId xmlns:a16="http://schemas.microsoft.com/office/drawing/2014/main" id="{6A697028-57EF-4D95-B88F-BCCA1A4CB232}"/>
+                <a16:creationId xmlns:a16="http://schemas.microsoft.com/office/drawing/2014/main" id="{4E265F1D-7AA9-47AF-A203-B7A36CAB5ACE}"/>
               </a:ext>
             </a:extLst>
           </p:cNvPr>
@@ -249,7 +249,7 @@
           <p:cNvPr id="4" name="Date Placeholder 3">
             <a:extLst>
               <a:ext uri="{FF2B5EF4-FFF2-40B4-BE49-F238E27FC236}">
-                <a16:creationId xmlns:a16="http://schemas.microsoft.com/office/drawing/2014/main" id="{CD9BC97E-02F7-4FFE-B4CD-AD9B6D6A5E36}"/>
+                <a16:creationId xmlns:a16="http://schemas.microsoft.com/office/drawing/2014/main" id="{09570311-244B-4316-A1F5-FFC804A52FCF}"/>
               </a:ext>
             </a:extLst>
           </p:cNvPr>
@@ -267,7 +267,7 @@
           <a:p>
             <a:fld id="{1DF0CC7D-D85C-4C9E-B27F-811A9302BECB}" type="datetimeFigureOut">
               <a:rPr lang="en-SG" smtClean="0"/>
-              <a:t>20/9/2025</a:t>
+              <a:t>21/9/2025</a:t>
             </a:fld>
             <a:endParaRPr lang="en-SG"/>
           </a:p>
@@ -278,7 +278,7 @@
           <p:cNvPr id="5" name="Footer Placeholder 4">
             <a:extLst>
               <a:ext uri="{FF2B5EF4-FFF2-40B4-BE49-F238E27FC236}">
-                <a16:creationId xmlns:a16="http://schemas.microsoft.com/office/drawing/2014/main" id="{02786D8B-9ABC-4CA8-9E2E-BC584E99B3E7}"/>
+                <a16:creationId xmlns:a16="http://schemas.microsoft.com/office/drawing/2014/main" id="{4D3F6D4C-790A-4778-B3B7-B51F1C1204FE}"/>
               </a:ext>
             </a:extLst>
           </p:cNvPr>
@@ -303,7 +303,7 @@
           <p:cNvPr id="6" name="Slide Number Placeholder 5">
             <a:extLst>
               <a:ext uri="{FF2B5EF4-FFF2-40B4-BE49-F238E27FC236}">
-                <a16:creationId xmlns:a16="http://schemas.microsoft.com/office/drawing/2014/main" id="{43FFEC38-A1F1-4B73-8B99-63A9523DE1A4}"/>
+                <a16:creationId xmlns:a16="http://schemas.microsoft.com/office/drawing/2014/main" id="{567E4F2B-7646-4795-91AD-2086E8B2F210}"/>
               </a:ext>
             </a:extLst>
           </p:cNvPr>
@@ -330,7 +330,7 @@
     </p:spTree>
     <p:extLst>
       <p:ext uri="{BB962C8B-B14F-4D97-AF65-F5344CB8AC3E}">
-        <p14:creationId xmlns:p14="http://schemas.microsoft.com/office/powerpoint/2010/main" val="586533129"/>
+        <p14:creationId xmlns:p14="http://schemas.microsoft.com/office/powerpoint/2010/main" val="2844431573"/>
       </p:ext>
     </p:extLst>
   </p:cSld>
@@ -362,7 +362,7 @@
           <p:cNvPr id="2" name="Title 1">
             <a:extLst>
               <a:ext uri="{FF2B5EF4-FFF2-40B4-BE49-F238E27FC236}">
-                <a16:creationId xmlns:a16="http://schemas.microsoft.com/office/drawing/2014/main" id="{79F28C1A-2BE2-4AE2-88F2-EE30A77854E9}"/>
+                <a16:creationId xmlns:a16="http://schemas.microsoft.com/office/drawing/2014/main" id="{FA017169-DB81-4844-A9D0-FB2F739FD0C5}"/>
               </a:ext>
             </a:extLst>
           </p:cNvPr>
@@ -391,7 +391,7 @@
           <p:cNvPr id="3" name="Vertical Text Placeholder 2">
             <a:extLst>
               <a:ext uri="{FF2B5EF4-FFF2-40B4-BE49-F238E27FC236}">
-                <a16:creationId xmlns:a16="http://schemas.microsoft.com/office/drawing/2014/main" id="{CC49916A-9788-4791-A2AB-79BBFBA6A5CB}"/>
+                <a16:creationId xmlns:a16="http://schemas.microsoft.com/office/drawing/2014/main" id="{B2DDBAFA-1059-4F77-85A3-96448C7F30A7}"/>
               </a:ext>
             </a:extLst>
           </p:cNvPr>
@@ -449,7 +449,7 @@
           <p:cNvPr id="4" name="Date Placeholder 3">
             <a:extLst>
               <a:ext uri="{FF2B5EF4-FFF2-40B4-BE49-F238E27FC236}">
-                <a16:creationId xmlns:a16="http://schemas.microsoft.com/office/drawing/2014/main" id="{6C1B89B5-C581-48CB-BC64-AD1769B2DDF9}"/>
+                <a16:creationId xmlns:a16="http://schemas.microsoft.com/office/drawing/2014/main" id="{9BF46AEE-3231-4888-A50C-F33BA5884E1A}"/>
               </a:ext>
             </a:extLst>
           </p:cNvPr>
@@ -467,7 +467,7 @@
           <a:p>
             <a:fld id="{1DF0CC7D-D85C-4C9E-B27F-811A9302BECB}" type="datetimeFigureOut">
               <a:rPr lang="en-SG" smtClean="0"/>
-              <a:t>20/9/2025</a:t>
+              <a:t>21/9/2025</a:t>
             </a:fld>
             <a:endParaRPr lang="en-SG"/>
           </a:p>
@@ -478,7 +478,7 @@
           <p:cNvPr id="5" name="Footer Placeholder 4">
             <a:extLst>
               <a:ext uri="{FF2B5EF4-FFF2-40B4-BE49-F238E27FC236}">
-                <a16:creationId xmlns:a16="http://schemas.microsoft.com/office/drawing/2014/main" id="{4AE6122A-3824-492A-BEE0-507566B77800}"/>
+                <a16:creationId xmlns:a16="http://schemas.microsoft.com/office/drawing/2014/main" id="{FD46ED78-0A4E-47EC-8761-4134BEACFE6E}"/>
               </a:ext>
             </a:extLst>
           </p:cNvPr>
@@ -503,7 +503,7 @@
           <p:cNvPr id="6" name="Slide Number Placeholder 5">
             <a:extLst>
               <a:ext uri="{FF2B5EF4-FFF2-40B4-BE49-F238E27FC236}">
-                <a16:creationId xmlns:a16="http://schemas.microsoft.com/office/drawing/2014/main" id="{50F8B653-0197-4DDE-83FB-05E8CA9A11BB}"/>
+                <a16:creationId xmlns:a16="http://schemas.microsoft.com/office/drawing/2014/main" id="{9FF4CE3E-C18F-4DB0-A4DA-F2BF11EE59A8}"/>
               </a:ext>
             </a:extLst>
           </p:cNvPr>
@@ -530,7 +530,7 @@
     </p:spTree>
     <p:extLst>
       <p:ext uri="{BB962C8B-B14F-4D97-AF65-F5344CB8AC3E}">
-        <p14:creationId xmlns:p14="http://schemas.microsoft.com/office/powerpoint/2010/main" val="2979280349"/>
+        <p14:creationId xmlns:p14="http://schemas.microsoft.com/office/powerpoint/2010/main" val="1464281442"/>
       </p:ext>
     </p:extLst>
   </p:cSld>
@@ -562,7 +562,7 @@
           <p:cNvPr id="2" name="Vertical Title 1">
             <a:extLst>
               <a:ext uri="{FF2B5EF4-FFF2-40B4-BE49-F238E27FC236}">
-                <a16:creationId xmlns:a16="http://schemas.microsoft.com/office/drawing/2014/main" id="{B92EE78F-E6B3-4625-BF31-453D8949282B}"/>
+                <a16:creationId xmlns:a16="http://schemas.microsoft.com/office/drawing/2014/main" id="{A5015AD5-A3A3-44B1-BA18-C7960216E529}"/>
               </a:ext>
             </a:extLst>
           </p:cNvPr>
@@ -596,7 +596,7 @@
           <p:cNvPr id="3" name="Vertical Text Placeholder 2">
             <a:extLst>
               <a:ext uri="{FF2B5EF4-FFF2-40B4-BE49-F238E27FC236}">
-                <a16:creationId xmlns:a16="http://schemas.microsoft.com/office/drawing/2014/main" id="{4A972742-B820-48D1-885B-3743AD139AEB}"/>
+                <a16:creationId xmlns:a16="http://schemas.microsoft.com/office/drawing/2014/main" id="{460681E5-4391-4037-B4FC-3D82DB680830}"/>
               </a:ext>
             </a:extLst>
           </p:cNvPr>
@@ -659,7 +659,7 @@
           <p:cNvPr id="4" name="Date Placeholder 3">
             <a:extLst>
               <a:ext uri="{FF2B5EF4-FFF2-40B4-BE49-F238E27FC236}">
-                <a16:creationId xmlns:a16="http://schemas.microsoft.com/office/drawing/2014/main" id="{FC2B5EC8-760E-486F-BF57-F796BB175F51}"/>
+                <a16:creationId xmlns:a16="http://schemas.microsoft.com/office/drawing/2014/main" id="{B15C85BE-3E62-4741-8197-4292B3DB39EC}"/>
               </a:ext>
             </a:extLst>
           </p:cNvPr>
@@ -677,7 +677,7 @@
           <a:p>
             <a:fld id="{1DF0CC7D-D85C-4C9E-B27F-811A9302BECB}" type="datetimeFigureOut">
               <a:rPr lang="en-SG" smtClean="0"/>
-              <a:t>20/9/2025</a:t>
+              <a:t>21/9/2025</a:t>
             </a:fld>
             <a:endParaRPr lang="en-SG"/>
           </a:p>
@@ -688,7 +688,7 @@
           <p:cNvPr id="5" name="Footer Placeholder 4">
             <a:extLst>
               <a:ext uri="{FF2B5EF4-FFF2-40B4-BE49-F238E27FC236}">
-                <a16:creationId xmlns:a16="http://schemas.microsoft.com/office/drawing/2014/main" id="{FBCE5A4F-A037-44BF-960D-FDF377BD9DF7}"/>
+                <a16:creationId xmlns:a16="http://schemas.microsoft.com/office/drawing/2014/main" id="{FAC41752-49E0-4BE0-8566-868BF76E41D0}"/>
               </a:ext>
             </a:extLst>
           </p:cNvPr>
@@ -713,7 +713,7 @@
           <p:cNvPr id="6" name="Slide Number Placeholder 5">
             <a:extLst>
               <a:ext uri="{FF2B5EF4-FFF2-40B4-BE49-F238E27FC236}">
-                <a16:creationId xmlns:a16="http://schemas.microsoft.com/office/drawing/2014/main" id="{86EF4543-1CD3-458E-9890-4B543668F670}"/>
+                <a16:creationId xmlns:a16="http://schemas.microsoft.com/office/drawing/2014/main" id="{48271351-190E-4DAA-AA16-BFFFFF222999}"/>
               </a:ext>
             </a:extLst>
           </p:cNvPr>
@@ -740,7 +740,7 @@
     </p:spTree>
     <p:extLst>
       <p:ext uri="{BB962C8B-B14F-4D97-AF65-F5344CB8AC3E}">
-        <p14:creationId xmlns:p14="http://schemas.microsoft.com/office/powerpoint/2010/main" val="2234438651"/>
+        <p14:creationId xmlns:p14="http://schemas.microsoft.com/office/powerpoint/2010/main" val="3291302766"/>
       </p:ext>
     </p:extLst>
   </p:cSld>
@@ -772,7 +772,7 @@
           <p:cNvPr id="2" name="Title 1">
             <a:extLst>
               <a:ext uri="{FF2B5EF4-FFF2-40B4-BE49-F238E27FC236}">
-                <a16:creationId xmlns:a16="http://schemas.microsoft.com/office/drawing/2014/main" id="{7D447A5E-5DAA-4456-96DA-7DDF73395F2A}"/>
+                <a16:creationId xmlns:a16="http://schemas.microsoft.com/office/drawing/2014/main" id="{A8C52DD6-3A98-4110-AD62-78E2247A120D}"/>
               </a:ext>
             </a:extLst>
           </p:cNvPr>
@@ -801,7 +801,7 @@
           <p:cNvPr id="3" name="Content Placeholder 2">
             <a:extLst>
               <a:ext uri="{FF2B5EF4-FFF2-40B4-BE49-F238E27FC236}">
-                <a16:creationId xmlns:a16="http://schemas.microsoft.com/office/drawing/2014/main" id="{9816C827-9BEA-4678-8517-0B541DB4A357}"/>
+                <a16:creationId xmlns:a16="http://schemas.microsoft.com/office/drawing/2014/main" id="{C9C23C59-C744-4BE4-9C40-976D9A7D7913}"/>
               </a:ext>
             </a:extLst>
           </p:cNvPr>
@@ -859,7 +859,7 @@
           <p:cNvPr id="4" name="Date Placeholder 3">
             <a:extLst>
               <a:ext uri="{FF2B5EF4-FFF2-40B4-BE49-F238E27FC236}">
-                <a16:creationId xmlns:a16="http://schemas.microsoft.com/office/drawing/2014/main" id="{44B727E7-ADFE-461C-9736-FE00D6F1D45B}"/>
+                <a16:creationId xmlns:a16="http://schemas.microsoft.com/office/drawing/2014/main" id="{BBFA82D3-BC91-486B-B318-57CE22C79D1E}"/>
               </a:ext>
             </a:extLst>
           </p:cNvPr>
@@ -877,7 +877,7 @@
           <a:p>
             <a:fld id="{1DF0CC7D-D85C-4C9E-B27F-811A9302BECB}" type="datetimeFigureOut">
               <a:rPr lang="en-SG" smtClean="0"/>
-              <a:t>20/9/2025</a:t>
+              <a:t>21/9/2025</a:t>
             </a:fld>
             <a:endParaRPr lang="en-SG"/>
           </a:p>
@@ -888,7 +888,7 @@
           <p:cNvPr id="5" name="Footer Placeholder 4">
             <a:extLst>
               <a:ext uri="{FF2B5EF4-FFF2-40B4-BE49-F238E27FC236}">
-                <a16:creationId xmlns:a16="http://schemas.microsoft.com/office/drawing/2014/main" id="{E06074C3-C1BC-47CC-9282-F7C7498400D0}"/>
+                <a16:creationId xmlns:a16="http://schemas.microsoft.com/office/drawing/2014/main" id="{7A36A1B1-453A-40BD-9A19-E4F6F7AAB316}"/>
               </a:ext>
             </a:extLst>
           </p:cNvPr>
@@ -913,7 +913,7 @@
           <p:cNvPr id="6" name="Slide Number Placeholder 5">
             <a:extLst>
               <a:ext uri="{FF2B5EF4-FFF2-40B4-BE49-F238E27FC236}">
-                <a16:creationId xmlns:a16="http://schemas.microsoft.com/office/drawing/2014/main" id="{7BAFD6B3-6507-4FCE-8786-4429EC725711}"/>
+                <a16:creationId xmlns:a16="http://schemas.microsoft.com/office/drawing/2014/main" id="{3D04A055-FC26-4F93-A2AB-032EA2874D02}"/>
               </a:ext>
             </a:extLst>
           </p:cNvPr>
@@ -940,7 +940,7 @@
     </p:spTree>
     <p:extLst>
       <p:ext uri="{BB962C8B-B14F-4D97-AF65-F5344CB8AC3E}">
-        <p14:creationId xmlns:p14="http://schemas.microsoft.com/office/powerpoint/2010/main" val="801962543"/>
+        <p14:creationId xmlns:p14="http://schemas.microsoft.com/office/powerpoint/2010/main" val="1549661441"/>
       </p:ext>
     </p:extLst>
   </p:cSld>
@@ -972,7 +972,7 @@
           <p:cNvPr id="2" name="Title 1">
             <a:extLst>
               <a:ext uri="{FF2B5EF4-FFF2-40B4-BE49-F238E27FC236}">
-                <a16:creationId xmlns:a16="http://schemas.microsoft.com/office/drawing/2014/main" id="{4E69F8DF-B763-4197-BB4B-B3ABD78718B2}"/>
+                <a16:creationId xmlns:a16="http://schemas.microsoft.com/office/drawing/2014/main" id="{76793226-7E95-4787-B0BA-5BEA5C9171A0}"/>
               </a:ext>
             </a:extLst>
           </p:cNvPr>
@@ -1010,7 +1010,7 @@
           <p:cNvPr id="3" name="Text Placeholder 2">
             <a:extLst>
               <a:ext uri="{FF2B5EF4-FFF2-40B4-BE49-F238E27FC236}">
-                <a16:creationId xmlns:a16="http://schemas.microsoft.com/office/drawing/2014/main" id="{80FD0BB1-65CD-4600-878E-B364F6E96F31}"/>
+                <a16:creationId xmlns:a16="http://schemas.microsoft.com/office/drawing/2014/main" id="{4FB4F810-97BF-464D-A19D-BBFB36AD9F47}"/>
               </a:ext>
             </a:extLst>
           </p:cNvPr>
@@ -1135,7 +1135,7 @@
           <p:cNvPr id="4" name="Date Placeholder 3">
             <a:extLst>
               <a:ext uri="{FF2B5EF4-FFF2-40B4-BE49-F238E27FC236}">
-                <a16:creationId xmlns:a16="http://schemas.microsoft.com/office/drawing/2014/main" id="{03A1FB61-0364-484F-8FEF-8F672BF289BA}"/>
+                <a16:creationId xmlns:a16="http://schemas.microsoft.com/office/drawing/2014/main" id="{7E69E5FF-708B-4192-A8A6-14AA2BCCA1D8}"/>
               </a:ext>
             </a:extLst>
           </p:cNvPr>
@@ -1153,7 +1153,7 @@
           <a:p>
             <a:fld id="{1DF0CC7D-D85C-4C9E-B27F-811A9302BECB}" type="datetimeFigureOut">
               <a:rPr lang="en-SG" smtClean="0"/>
-              <a:t>20/9/2025</a:t>
+              <a:t>21/9/2025</a:t>
             </a:fld>
             <a:endParaRPr lang="en-SG"/>
           </a:p>
@@ -1164,7 +1164,7 @@
           <p:cNvPr id="5" name="Footer Placeholder 4">
             <a:extLst>
               <a:ext uri="{FF2B5EF4-FFF2-40B4-BE49-F238E27FC236}">
-                <a16:creationId xmlns:a16="http://schemas.microsoft.com/office/drawing/2014/main" id="{FF848879-69D1-418A-B5EA-B83F46B9E24C}"/>
+                <a16:creationId xmlns:a16="http://schemas.microsoft.com/office/drawing/2014/main" id="{040576BF-5FB7-4F3C-9F6C-11B26AAF6FDD}"/>
               </a:ext>
             </a:extLst>
           </p:cNvPr>
@@ -1189,7 +1189,7 @@
           <p:cNvPr id="6" name="Slide Number Placeholder 5">
             <a:extLst>
               <a:ext uri="{FF2B5EF4-FFF2-40B4-BE49-F238E27FC236}">
-                <a16:creationId xmlns:a16="http://schemas.microsoft.com/office/drawing/2014/main" id="{0D2078A6-1CD2-407A-9167-A648861C6AA7}"/>
+                <a16:creationId xmlns:a16="http://schemas.microsoft.com/office/drawing/2014/main" id="{368807FD-2D92-4EB2-A7D9-0C503C6DD852}"/>
               </a:ext>
             </a:extLst>
           </p:cNvPr>
@@ -1216,7 +1216,7 @@
     </p:spTree>
     <p:extLst>
       <p:ext uri="{BB962C8B-B14F-4D97-AF65-F5344CB8AC3E}">
-        <p14:creationId xmlns:p14="http://schemas.microsoft.com/office/powerpoint/2010/main" val="1104899849"/>
+        <p14:creationId xmlns:p14="http://schemas.microsoft.com/office/powerpoint/2010/main" val="2878197671"/>
       </p:ext>
     </p:extLst>
   </p:cSld>
@@ -1248,7 +1248,7 @@
           <p:cNvPr id="2" name="Title 1">
             <a:extLst>
               <a:ext uri="{FF2B5EF4-FFF2-40B4-BE49-F238E27FC236}">
-                <a16:creationId xmlns:a16="http://schemas.microsoft.com/office/drawing/2014/main" id="{B64BBEE4-C558-4C78-B2D9-7C368911ADD5}"/>
+                <a16:creationId xmlns:a16="http://schemas.microsoft.com/office/drawing/2014/main" id="{C4273B51-3F59-4DDD-8046-E4716CC63DDB}"/>
               </a:ext>
             </a:extLst>
           </p:cNvPr>
@@ -1277,7 +1277,7 @@
           <p:cNvPr id="3" name="Content Placeholder 2">
             <a:extLst>
               <a:ext uri="{FF2B5EF4-FFF2-40B4-BE49-F238E27FC236}">
-                <a16:creationId xmlns:a16="http://schemas.microsoft.com/office/drawing/2014/main" id="{6A37FCF1-CED2-43A1-B294-EADD8FB86AA3}"/>
+                <a16:creationId xmlns:a16="http://schemas.microsoft.com/office/drawing/2014/main" id="{B5B1C753-8127-4686-844A-513F81BF4929}"/>
               </a:ext>
             </a:extLst>
           </p:cNvPr>
@@ -1340,7 +1340,7 @@
           <p:cNvPr id="4" name="Content Placeholder 3">
             <a:extLst>
               <a:ext uri="{FF2B5EF4-FFF2-40B4-BE49-F238E27FC236}">
-                <a16:creationId xmlns:a16="http://schemas.microsoft.com/office/drawing/2014/main" id="{F5B81CEC-9047-4028-9638-98376D219329}"/>
+                <a16:creationId xmlns:a16="http://schemas.microsoft.com/office/drawing/2014/main" id="{15EEB8A9-268E-4850-BBFB-4E5A36C49D25}"/>
               </a:ext>
             </a:extLst>
           </p:cNvPr>
@@ -1403,7 +1403,7 @@
           <p:cNvPr id="5" name="Date Placeholder 4">
             <a:extLst>
               <a:ext uri="{FF2B5EF4-FFF2-40B4-BE49-F238E27FC236}">
-                <a16:creationId xmlns:a16="http://schemas.microsoft.com/office/drawing/2014/main" id="{16238870-A9A3-499D-A187-2F14659D15BD}"/>
+                <a16:creationId xmlns:a16="http://schemas.microsoft.com/office/drawing/2014/main" id="{53095D8D-11EA-470C-ADAC-395C8F875F63}"/>
               </a:ext>
             </a:extLst>
           </p:cNvPr>
@@ -1421,7 +1421,7 @@
           <a:p>
             <a:fld id="{1DF0CC7D-D85C-4C9E-B27F-811A9302BECB}" type="datetimeFigureOut">
               <a:rPr lang="en-SG" smtClean="0"/>
-              <a:t>20/9/2025</a:t>
+              <a:t>21/9/2025</a:t>
             </a:fld>
             <a:endParaRPr lang="en-SG"/>
           </a:p>
@@ -1432,7 +1432,7 @@
           <p:cNvPr id="6" name="Footer Placeholder 5">
             <a:extLst>
               <a:ext uri="{FF2B5EF4-FFF2-40B4-BE49-F238E27FC236}">
-                <a16:creationId xmlns:a16="http://schemas.microsoft.com/office/drawing/2014/main" id="{D05BD51D-0A59-4825-9019-EF730D26409B}"/>
+                <a16:creationId xmlns:a16="http://schemas.microsoft.com/office/drawing/2014/main" id="{344DE9A4-EF41-41C1-B73B-7852B700DDCE}"/>
               </a:ext>
             </a:extLst>
           </p:cNvPr>
@@ -1457,7 +1457,7 @@
           <p:cNvPr id="7" name="Slide Number Placeholder 6">
             <a:extLst>
               <a:ext uri="{FF2B5EF4-FFF2-40B4-BE49-F238E27FC236}">
-                <a16:creationId xmlns:a16="http://schemas.microsoft.com/office/drawing/2014/main" id="{C807E91B-C507-465F-A70F-D79FE226498E}"/>
+                <a16:creationId xmlns:a16="http://schemas.microsoft.com/office/drawing/2014/main" id="{AEE3F9E0-CA9E-4ED6-871E-E7A5B7D952DE}"/>
               </a:ext>
             </a:extLst>
           </p:cNvPr>
@@ -1484,7 +1484,7 @@
     </p:spTree>
     <p:extLst>
       <p:ext uri="{BB962C8B-B14F-4D97-AF65-F5344CB8AC3E}">
-        <p14:creationId xmlns:p14="http://schemas.microsoft.com/office/powerpoint/2010/main" val="2342365871"/>
+        <p14:creationId xmlns:p14="http://schemas.microsoft.com/office/powerpoint/2010/main" val="1771000867"/>
       </p:ext>
     </p:extLst>
   </p:cSld>
@@ -1516,7 +1516,7 @@
           <p:cNvPr id="2" name="Title 1">
             <a:extLst>
               <a:ext uri="{FF2B5EF4-FFF2-40B4-BE49-F238E27FC236}">
-                <a16:creationId xmlns:a16="http://schemas.microsoft.com/office/drawing/2014/main" id="{327C0ECA-2B31-4EC3-BC17-EAF729856205}"/>
+                <a16:creationId xmlns:a16="http://schemas.microsoft.com/office/drawing/2014/main" id="{29087BCD-9409-4BE4-B325-32823A6EA508}"/>
               </a:ext>
             </a:extLst>
           </p:cNvPr>
@@ -1550,7 +1550,7 @@
           <p:cNvPr id="3" name="Text Placeholder 2">
             <a:extLst>
               <a:ext uri="{FF2B5EF4-FFF2-40B4-BE49-F238E27FC236}">
-                <a16:creationId xmlns:a16="http://schemas.microsoft.com/office/drawing/2014/main" id="{BE512C51-DEC6-4C15-86CB-48723B8B9F20}"/>
+                <a16:creationId xmlns:a16="http://schemas.microsoft.com/office/drawing/2014/main" id="{AE3CC82F-9C60-4D94-98D9-7BFB863869F6}"/>
               </a:ext>
             </a:extLst>
           </p:cNvPr>
@@ -1621,7 +1621,7 @@
           <p:cNvPr id="4" name="Content Placeholder 3">
             <a:extLst>
               <a:ext uri="{FF2B5EF4-FFF2-40B4-BE49-F238E27FC236}">
-                <a16:creationId xmlns:a16="http://schemas.microsoft.com/office/drawing/2014/main" id="{5CCC24CA-D1EE-474F-8C5A-857C59104253}"/>
+                <a16:creationId xmlns:a16="http://schemas.microsoft.com/office/drawing/2014/main" id="{FB04AD4C-0635-4693-A5AB-DA6953B0E05A}"/>
               </a:ext>
             </a:extLst>
           </p:cNvPr>
@@ -1684,7 +1684,7 @@
           <p:cNvPr id="5" name="Text Placeholder 4">
             <a:extLst>
               <a:ext uri="{FF2B5EF4-FFF2-40B4-BE49-F238E27FC236}">
-                <a16:creationId xmlns:a16="http://schemas.microsoft.com/office/drawing/2014/main" id="{3A19DF07-D9D5-47E0-995F-3A5B6C0EC144}"/>
+                <a16:creationId xmlns:a16="http://schemas.microsoft.com/office/drawing/2014/main" id="{2A08F183-3439-44D2-A663-B4683E731056}"/>
               </a:ext>
             </a:extLst>
           </p:cNvPr>
@@ -1755,7 +1755,7 @@
           <p:cNvPr id="6" name="Content Placeholder 5">
             <a:extLst>
               <a:ext uri="{FF2B5EF4-FFF2-40B4-BE49-F238E27FC236}">
-                <a16:creationId xmlns:a16="http://schemas.microsoft.com/office/drawing/2014/main" id="{7B1BD0B1-A037-4CA7-98E2-AEE38C3759F5}"/>
+                <a16:creationId xmlns:a16="http://schemas.microsoft.com/office/drawing/2014/main" id="{4790D1BA-862A-46A9-A995-412513F8EFE3}"/>
               </a:ext>
             </a:extLst>
           </p:cNvPr>
@@ -1818,7 +1818,7 @@
           <p:cNvPr id="7" name="Date Placeholder 6">
             <a:extLst>
               <a:ext uri="{FF2B5EF4-FFF2-40B4-BE49-F238E27FC236}">
-                <a16:creationId xmlns:a16="http://schemas.microsoft.com/office/drawing/2014/main" id="{A4737EA9-17E3-4C9E-B1B5-4ADB6B73CF6C}"/>
+                <a16:creationId xmlns:a16="http://schemas.microsoft.com/office/drawing/2014/main" id="{F72B02E8-6EBE-41BC-8E46-BB436806C1E2}"/>
               </a:ext>
             </a:extLst>
           </p:cNvPr>
@@ -1836,7 +1836,7 @@
           <a:p>
             <a:fld id="{1DF0CC7D-D85C-4C9E-B27F-811A9302BECB}" type="datetimeFigureOut">
               <a:rPr lang="en-SG" smtClean="0"/>
-              <a:t>20/9/2025</a:t>
+              <a:t>21/9/2025</a:t>
             </a:fld>
             <a:endParaRPr lang="en-SG"/>
           </a:p>
@@ -1847,7 +1847,7 @@
           <p:cNvPr id="8" name="Footer Placeholder 7">
             <a:extLst>
               <a:ext uri="{FF2B5EF4-FFF2-40B4-BE49-F238E27FC236}">
-                <a16:creationId xmlns:a16="http://schemas.microsoft.com/office/drawing/2014/main" id="{EFB91DB7-70A2-40B0-9A97-D9964A7DBFCB}"/>
+                <a16:creationId xmlns:a16="http://schemas.microsoft.com/office/drawing/2014/main" id="{B5DB9B9D-71CC-441D-AD82-BE48679AE2AB}"/>
               </a:ext>
             </a:extLst>
           </p:cNvPr>
@@ -1872,7 +1872,7 @@
           <p:cNvPr id="9" name="Slide Number Placeholder 8">
             <a:extLst>
               <a:ext uri="{FF2B5EF4-FFF2-40B4-BE49-F238E27FC236}">
-                <a16:creationId xmlns:a16="http://schemas.microsoft.com/office/drawing/2014/main" id="{39803D41-C286-495E-97FB-3FA58278D174}"/>
+                <a16:creationId xmlns:a16="http://schemas.microsoft.com/office/drawing/2014/main" id="{E2515E09-9646-4CE9-923C-F1F8D463494F}"/>
               </a:ext>
             </a:extLst>
           </p:cNvPr>
@@ -1899,7 +1899,7 @@
     </p:spTree>
     <p:extLst>
       <p:ext uri="{BB962C8B-B14F-4D97-AF65-F5344CB8AC3E}">
-        <p14:creationId xmlns:p14="http://schemas.microsoft.com/office/powerpoint/2010/main" val="3230492007"/>
+        <p14:creationId xmlns:p14="http://schemas.microsoft.com/office/powerpoint/2010/main" val="848929319"/>
       </p:ext>
     </p:extLst>
   </p:cSld>
@@ -1931,7 +1931,7 @@
           <p:cNvPr id="2" name="Title 1">
             <a:extLst>
               <a:ext uri="{FF2B5EF4-FFF2-40B4-BE49-F238E27FC236}">
-                <a16:creationId xmlns:a16="http://schemas.microsoft.com/office/drawing/2014/main" id="{1C6279C4-631A-46BD-8999-66D1EEC47728}"/>
+                <a16:creationId xmlns:a16="http://schemas.microsoft.com/office/drawing/2014/main" id="{2E3D84B4-C38A-47F8-A987-F5228C3CB22D}"/>
               </a:ext>
             </a:extLst>
           </p:cNvPr>
@@ -1960,7 +1960,7 @@
           <p:cNvPr id="3" name="Date Placeholder 2">
             <a:extLst>
               <a:ext uri="{FF2B5EF4-FFF2-40B4-BE49-F238E27FC236}">
-                <a16:creationId xmlns:a16="http://schemas.microsoft.com/office/drawing/2014/main" id="{62326870-1413-487A-828C-CD7238DF3B2B}"/>
+                <a16:creationId xmlns:a16="http://schemas.microsoft.com/office/drawing/2014/main" id="{358DDA55-C8A9-4FD4-8BFB-A4DBCF693D39}"/>
               </a:ext>
             </a:extLst>
           </p:cNvPr>
@@ -1978,7 +1978,7 @@
           <a:p>
             <a:fld id="{1DF0CC7D-D85C-4C9E-B27F-811A9302BECB}" type="datetimeFigureOut">
               <a:rPr lang="en-SG" smtClean="0"/>
-              <a:t>20/9/2025</a:t>
+              <a:t>21/9/2025</a:t>
             </a:fld>
             <a:endParaRPr lang="en-SG"/>
           </a:p>
@@ -1989,7 +1989,7 @@
           <p:cNvPr id="4" name="Footer Placeholder 3">
             <a:extLst>
               <a:ext uri="{FF2B5EF4-FFF2-40B4-BE49-F238E27FC236}">
-                <a16:creationId xmlns:a16="http://schemas.microsoft.com/office/drawing/2014/main" id="{2AFFF4D3-6760-471E-A016-5789506DBEE9}"/>
+                <a16:creationId xmlns:a16="http://schemas.microsoft.com/office/drawing/2014/main" id="{BF9281BF-6B30-4204-BB0B-1D94CED06763}"/>
               </a:ext>
             </a:extLst>
           </p:cNvPr>
@@ -2014,7 +2014,7 @@
           <p:cNvPr id="5" name="Slide Number Placeholder 4">
             <a:extLst>
               <a:ext uri="{FF2B5EF4-FFF2-40B4-BE49-F238E27FC236}">
-                <a16:creationId xmlns:a16="http://schemas.microsoft.com/office/drawing/2014/main" id="{13D70C60-3DAB-4510-AD3E-13D6A76E0194}"/>
+                <a16:creationId xmlns:a16="http://schemas.microsoft.com/office/drawing/2014/main" id="{9666311B-ABB3-477F-A6C8-6F8D3C4894C9}"/>
               </a:ext>
             </a:extLst>
           </p:cNvPr>
@@ -2041,7 +2041,7 @@
     </p:spTree>
     <p:extLst>
       <p:ext uri="{BB962C8B-B14F-4D97-AF65-F5344CB8AC3E}">
-        <p14:creationId xmlns:p14="http://schemas.microsoft.com/office/powerpoint/2010/main" val="1813055647"/>
+        <p14:creationId xmlns:p14="http://schemas.microsoft.com/office/powerpoint/2010/main" val="3457761895"/>
       </p:ext>
     </p:extLst>
   </p:cSld>
@@ -2073,7 +2073,7 @@
           <p:cNvPr id="2" name="Date Placeholder 1">
             <a:extLst>
               <a:ext uri="{FF2B5EF4-FFF2-40B4-BE49-F238E27FC236}">
-                <a16:creationId xmlns:a16="http://schemas.microsoft.com/office/drawing/2014/main" id="{FD8B70CF-5883-46EC-85B6-1BA18225093F}"/>
+                <a16:creationId xmlns:a16="http://schemas.microsoft.com/office/drawing/2014/main" id="{277FF316-CCF5-4F7E-9F70-AD09C8D382ED}"/>
               </a:ext>
             </a:extLst>
           </p:cNvPr>
@@ -2091,7 +2091,7 @@
           <a:p>
             <a:fld id="{1DF0CC7D-D85C-4C9E-B27F-811A9302BECB}" type="datetimeFigureOut">
               <a:rPr lang="en-SG" smtClean="0"/>
-              <a:t>20/9/2025</a:t>
+              <a:t>21/9/2025</a:t>
             </a:fld>
             <a:endParaRPr lang="en-SG"/>
           </a:p>
@@ -2102,7 +2102,7 @@
           <p:cNvPr id="3" name="Footer Placeholder 2">
             <a:extLst>
               <a:ext uri="{FF2B5EF4-FFF2-40B4-BE49-F238E27FC236}">
-                <a16:creationId xmlns:a16="http://schemas.microsoft.com/office/drawing/2014/main" id="{88933A4D-3369-40CC-BE38-4AEC1A557381}"/>
+                <a16:creationId xmlns:a16="http://schemas.microsoft.com/office/drawing/2014/main" id="{64F55CAB-785C-4CBD-8120-E90F8083937C}"/>
               </a:ext>
             </a:extLst>
           </p:cNvPr>
@@ -2127,7 +2127,7 @@
           <p:cNvPr id="4" name="Slide Number Placeholder 3">
             <a:extLst>
               <a:ext uri="{FF2B5EF4-FFF2-40B4-BE49-F238E27FC236}">
-                <a16:creationId xmlns:a16="http://schemas.microsoft.com/office/drawing/2014/main" id="{1E0F1F19-E2ED-42F1-911F-BA61562DE387}"/>
+                <a16:creationId xmlns:a16="http://schemas.microsoft.com/office/drawing/2014/main" id="{3D2B9229-C7E0-49BA-A9EE-634E76AA557A}"/>
               </a:ext>
             </a:extLst>
           </p:cNvPr>
@@ -2154,7 +2154,7 @@
     </p:spTree>
     <p:extLst>
       <p:ext uri="{BB962C8B-B14F-4D97-AF65-F5344CB8AC3E}">
-        <p14:creationId xmlns:p14="http://schemas.microsoft.com/office/powerpoint/2010/main" val="3289843281"/>
+        <p14:creationId xmlns:p14="http://schemas.microsoft.com/office/powerpoint/2010/main" val="1353319400"/>
       </p:ext>
     </p:extLst>
   </p:cSld>
@@ -2186,7 +2186,7 @@
           <p:cNvPr id="2" name="Title 1">
             <a:extLst>
               <a:ext uri="{FF2B5EF4-FFF2-40B4-BE49-F238E27FC236}">
-                <a16:creationId xmlns:a16="http://schemas.microsoft.com/office/drawing/2014/main" id="{3DC0884D-938D-4BA5-9588-34A8DEF215DA}"/>
+                <a16:creationId xmlns:a16="http://schemas.microsoft.com/office/drawing/2014/main" id="{7F691536-84CE-44D6-91BE-CBEEB15FB9AC}"/>
               </a:ext>
             </a:extLst>
           </p:cNvPr>
@@ -2224,7 +2224,7 @@
           <p:cNvPr id="3" name="Content Placeholder 2">
             <a:extLst>
               <a:ext uri="{FF2B5EF4-FFF2-40B4-BE49-F238E27FC236}">
-                <a16:creationId xmlns:a16="http://schemas.microsoft.com/office/drawing/2014/main" id="{5D0FC530-3D69-4B41-BD90-8CBD4D889B43}"/>
+                <a16:creationId xmlns:a16="http://schemas.microsoft.com/office/drawing/2014/main" id="{0F2105C9-0257-4AE6-B26E-AFDF4D1A327C}"/>
               </a:ext>
             </a:extLst>
           </p:cNvPr>
@@ -2315,7 +2315,7 @@
           <p:cNvPr id="4" name="Text Placeholder 3">
             <a:extLst>
               <a:ext uri="{FF2B5EF4-FFF2-40B4-BE49-F238E27FC236}">
-                <a16:creationId xmlns:a16="http://schemas.microsoft.com/office/drawing/2014/main" id="{5B2991BF-FF95-4254-93EC-B3D55143092D}"/>
+                <a16:creationId xmlns:a16="http://schemas.microsoft.com/office/drawing/2014/main" id="{6D8FC0F1-F388-4735-A019-9CA25E8CAEF4}"/>
               </a:ext>
             </a:extLst>
           </p:cNvPr>
@@ -2386,7 +2386,7 @@
           <p:cNvPr id="5" name="Date Placeholder 4">
             <a:extLst>
               <a:ext uri="{FF2B5EF4-FFF2-40B4-BE49-F238E27FC236}">
-                <a16:creationId xmlns:a16="http://schemas.microsoft.com/office/drawing/2014/main" id="{C7C25439-93B2-4018-AFDE-149E7AFF6DEE}"/>
+                <a16:creationId xmlns:a16="http://schemas.microsoft.com/office/drawing/2014/main" id="{DAEAD728-1B0C-4D9D-86D7-751ABA7EFE09}"/>
               </a:ext>
             </a:extLst>
           </p:cNvPr>
@@ -2404,7 +2404,7 @@
           <a:p>
             <a:fld id="{1DF0CC7D-D85C-4C9E-B27F-811A9302BECB}" type="datetimeFigureOut">
               <a:rPr lang="en-SG" smtClean="0"/>
-              <a:t>20/9/2025</a:t>
+              <a:t>21/9/2025</a:t>
             </a:fld>
             <a:endParaRPr lang="en-SG"/>
           </a:p>
@@ -2415,7 +2415,7 @@
           <p:cNvPr id="6" name="Footer Placeholder 5">
             <a:extLst>
               <a:ext uri="{FF2B5EF4-FFF2-40B4-BE49-F238E27FC236}">
-                <a16:creationId xmlns:a16="http://schemas.microsoft.com/office/drawing/2014/main" id="{AA4EC185-0702-4E8A-9E56-F127AB6FE383}"/>
+                <a16:creationId xmlns:a16="http://schemas.microsoft.com/office/drawing/2014/main" id="{3A245DE0-7210-4682-BC09-E836411B89EC}"/>
               </a:ext>
             </a:extLst>
           </p:cNvPr>
@@ -2440,7 +2440,7 @@
           <p:cNvPr id="7" name="Slide Number Placeholder 6">
             <a:extLst>
               <a:ext uri="{FF2B5EF4-FFF2-40B4-BE49-F238E27FC236}">
-                <a16:creationId xmlns:a16="http://schemas.microsoft.com/office/drawing/2014/main" id="{3FB281B0-D54E-4A22-AB15-B6237962D6E3}"/>
+                <a16:creationId xmlns:a16="http://schemas.microsoft.com/office/drawing/2014/main" id="{C2BDE1DF-42D0-4FB2-92E1-2D5296E4780C}"/>
               </a:ext>
             </a:extLst>
           </p:cNvPr>
@@ -2467,7 +2467,7 @@
     </p:spTree>
     <p:extLst>
       <p:ext uri="{BB962C8B-B14F-4D97-AF65-F5344CB8AC3E}">
-        <p14:creationId xmlns:p14="http://schemas.microsoft.com/office/powerpoint/2010/main" val="3311743076"/>
+        <p14:creationId xmlns:p14="http://schemas.microsoft.com/office/powerpoint/2010/main" val="790252521"/>
       </p:ext>
     </p:extLst>
   </p:cSld>
@@ -2499,7 +2499,7 @@
           <p:cNvPr id="2" name="Title 1">
             <a:extLst>
               <a:ext uri="{FF2B5EF4-FFF2-40B4-BE49-F238E27FC236}">
-                <a16:creationId xmlns:a16="http://schemas.microsoft.com/office/drawing/2014/main" id="{1B824B4B-4206-40B3-A190-9B19E3DC5F1B}"/>
+                <a16:creationId xmlns:a16="http://schemas.microsoft.com/office/drawing/2014/main" id="{48C461F6-B3E5-4026-ACFE-26AF46D02D59}"/>
               </a:ext>
             </a:extLst>
           </p:cNvPr>
@@ -2537,7 +2537,7 @@
           <p:cNvPr id="3" name="Picture Placeholder 2">
             <a:extLst>
               <a:ext uri="{FF2B5EF4-FFF2-40B4-BE49-F238E27FC236}">
-                <a16:creationId xmlns:a16="http://schemas.microsoft.com/office/drawing/2014/main" id="{EE5B4680-CF13-4663-AD0C-8992BD53E9AB}"/>
+                <a16:creationId xmlns:a16="http://schemas.microsoft.com/office/drawing/2014/main" id="{518E6FB1-4C4E-4267-AF8C-0020C4F2DBDA}"/>
               </a:ext>
             </a:extLst>
           </p:cNvPr>
@@ -2604,7 +2604,7 @@
           <p:cNvPr id="4" name="Text Placeholder 3">
             <a:extLst>
               <a:ext uri="{FF2B5EF4-FFF2-40B4-BE49-F238E27FC236}">
-                <a16:creationId xmlns:a16="http://schemas.microsoft.com/office/drawing/2014/main" id="{3E8A3377-AAC4-49B1-9699-73BFF48C3EE4}"/>
+                <a16:creationId xmlns:a16="http://schemas.microsoft.com/office/drawing/2014/main" id="{5B8519A1-6E9B-4E4B-A3B7-C06B6697B7B6}"/>
               </a:ext>
             </a:extLst>
           </p:cNvPr>
@@ -2675,7 +2675,7 @@
           <p:cNvPr id="5" name="Date Placeholder 4">
             <a:extLst>
               <a:ext uri="{FF2B5EF4-FFF2-40B4-BE49-F238E27FC236}">
-                <a16:creationId xmlns:a16="http://schemas.microsoft.com/office/drawing/2014/main" id="{AA6B86F9-FA5D-4AB1-9E5B-6664B934330E}"/>
+                <a16:creationId xmlns:a16="http://schemas.microsoft.com/office/drawing/2014/main" id="{4D32D428-7437-49BA-B95E-D782532CF0C5}"/>
               </a:ext>
             </a:extLst>
           </p:cNvPr>
@@ -2693,7 +2693,7 @@
           <a:p>
             <a:fld id="{1DF0CC7D-D85C-4C9E-B27F-811A9302BECB}" type="datetimeFigureOut">
               <a:rPr lang="en-SG" smtClean="0"/>
-              <a:t>20/9/2025</a:t>
+              <a:t>21/9/2025</a:t>
             </a:fld>
             <a:endParaRPr lang="en-SG"/>
           </a:p>
@@ -2704,7 +2704,7 @@
           <p:cNvPr id="6" name="Footer Placeholder 5">
             <a:extLst>
               <a:ext uri="{FF2B5EF4-FFF2-40B4-BE49-F238E27FC236}">
-                <a16:creationId xmlns:a16="http://schemas.microsoft.com/office/drawing/2014/main" id="{E6B38AEF-5E32-4436-B433-AD731227D7CA}"/>
+                <a16:creationId xmlns:a16="http://schemas.microsoft.com/office/drawing/2014/main" id="{B65D387B-8F84-4F06-92C3-4106E85D9365}"/>
               </a:ext>
             </a:extLst>
           </p:cNvPr>
@@ -2729,7 +2729,7 @@
           <p:cNvPr id="7" name="Slide Number Placeholder 6">
             <a:extLst>
               <a:ext uri="{FF2B5EF4-FFF2-40B4-BE49-F238E27FC236}">
-                <a16:creationId xmlns:a16="http://schemas.microsoft.com/office/drawing/2014/main" id="{0965FECE-7310-4898-B20C-BB70DC0AED8D}"/>
+                <a16:creationId xmlns:a16="http://schemas.microsoft.com/office/drawing/2014/main" id="{B0DC2172-A2B6-43CF-AD2E-888D7FB02D1A}"/>
               </a:ext>
             </a:extLst>
           </p:cNvPr>
@@ -2756,7 +2756,7 @@
     </p:spTree>
     <p:extLst>
       <p:ext uri="{BB962C8B-B14F-4D97-AF65-F5344CB8AC3E}">
-        <p14:creationId xmlns:p14="http://schemas.microsoft.com/office/powerpoint/2010/main" val="1959138980"/>
+        <p14:creationId xmlns:p14="http://schemas.microsoft.com/office/powerpoint/2010/main" val="2784667416"/>
       </p:ext>
     </p:extLst>
   </p:cSld>
@@ -2793,7 +2793,7 @@
           <p:cNvPr id="2" name="Title Placeholder 1">
             <a:extLst>
               <a:ext uri="{FF2B5EF4-FFF2-40B4-BE49-F238E27FC236}">
-                <a16:creationId xmlns:a16="http://schemas.microsoft.com/office/drawing/2014/main" id="{3DB75B1B-BE6A-47B7-9BA7-B391EFBF12F2}"/>
+                <a16:creationId xmlns:a16="http://schemas.microsoft.com/office/drawing/2014/main" id="{501347A4-F0D3-4FA3-A3E9-1D57057E84D6}"/>
               </a:ext>
             </a:extLst>
           </p:cNvPr>
@@ -2832,7 +2832,7 @@
           <p:cNvPr id="3" name="Text Placeholder 2">
             <a:extLst>
               <a:ext uri="{FF2B5EF4-FFF2-40B4-BE49-F238E27FC236}">
-                <a16:creationId xmlns:a16="http://schemas.microsoft.com/office/drawing/2014/main" id="{90159608-0176-4DC4-B16C-1FCE114B1F8A}"/>
+                <a16:creationId xmlns:a16="http://schemas.microsoft.com/office/drawing/2014/main" id="{BFC8147A-8D5C-4D1E-B533-94347E7831B2}"/>
               </a:ext>
             </a:extLst>
           </p:cNvPr>
@@ -2900,7 +2900,7 @@
           <p:cNvPr id="4" name="Date Placeholder 3">
             <a:extLst>
               <a:ext uri="{FF2B5EF4-FFF2-40B4-BE49-F238E27FC236}">
-                <a16:creationId xmlns:a16="http://schemas.microsoft.com/office/drawing/2014/main" id="{861C387F-1C66-489B-AE3D-9E0E329694E6}"/>
+                <a16:creationId xmlns:a16="http://schemas.microsoft.com/office/drawing/2014/main" id="{4C859524-8B20-4AE1-8332-8A84B2630832}"/>
               </a:ext>
             </a:extLst>
           </p:cNvPr>
@@ -2936,7 +2936,7 @@
           <a:p>
             <a:fld id="{1DF0CC7D-D85C-4C9E-B27F-811A9302BECB}" type="datetimeFigureOut">
               <a:rPr lang="en-SG" smtClean="0"/>
-              <a:t>20/9/2025</a:t>
+              <a:t>21/9/2025</a:t>
             </a:fld>
             <a:endParaRPr lang="en-SG"/>
           </a:p>
@@ -2947,7 +2947,7 @@
           <p:cNvPr id="5" name="Footer Placeholder 4">
             <a:extLst>
               <a:ext uri="{FF2B5EF4-FFF2-40B4-BE49-F238E27FC236}">
-                <a16:creationId xmlns:a16="http://schemas.microsoft.com/office/drawing/2014/main" id="{4EFA9F3C-9C92-46AB-9375-D61CA9CF431C}"/>
+                <a16:creationId xmlns:a16="http://schemas.microsoft.com/office/drawing/2014/main" id="{25E97FF7-AB93-41FC-B199-0CBC3A1F2F72}"/>
               </a:ext>
             </a:extLst>
           </p:cNvPr>
@@ -2990,7 +2990,7 @@
           <p:cNvPr id="6" name="Slide Number Placeholder 5">
             <a:extLst>
               <a:ext uri="{FF2B5EF4-FFF2-40B4-BE49-F238E27FC236}">
-                <a16:creationId xmlns:a16="http://schemas.microsoft.com/office/drawing/2014/main" id="{E593D3B1-7F71-453F-9BCB-7ED7070ECDB4}"/>
+                <a16:creationId xmlns:a16="http://schemas.microsoft.com/office/drawing/2014/main" id="{97F04E2B-DEC4-4E3C-8E7C-8949528F1210}"/>
               </a:ext>
             </a:extLst>
           </p:cNvPr>
@@ -3035,23 +3035,23 @@
     </p:spTree>
     <p:extLst>
       <p:ext uri="{BB962C8B-B14F-4D97-AF65-F5344CB8AC3E}">
-        <p14:creationId xmlns:p14="http://schemas.microsoft.com/office/powerpoint/2010/main" val="2268091299"/>
+        <p14:creationId xmlns:p14="http://schemas.microsoft.com/office/powerpoint/2010/main" val="569177043"/>
       </p:ext>
     </p:extLst>
   </p:cSld>
   <p:clrMap bg1="lt1" tx1="dk1" bg2="lt2" tx2="dk2" accent1="accent1" accent2="accent2" accent3="accent3" accent4="accent4" accent5="accent5" accent6="accent6" hlink="hlink" folHlink="folHlink"/>
   <p:sldLayoutIdLst>
-    <p:sldLayoutId id="2147483649" r:id="rId1"/>
-    <p:sldLayoutId id="2147483650" r:id="rId2"/>
-    <p:sldLayoutId id="2147483651" r:id="rId3"/>
-    <p:sldLayoutId id="2147483652" r:id="rId4"/>
-    <p:sldLayoutId id="2147483653" r:id="rId5"/>
-    <p:sldLayoutId id="2147483654" r:id="rId6"/>
-    <p:sldLayoutId id="2147483655" r:id="rId7"/>
-    <p:sldLayoutId id="2147483656" r:id="rId8"/>
-    <p:sldLayoutId id="2147483657" r:id="rId9"/>
-    <p:sldLayoutId id="2147483658" r:id="rId10"/>
-    <p:sldLayoutId id="2147483659" r:id="rId11"/>
+    <p:sldLayoutId id="2147483679" r:id="rId1"/>
+    <p:sldLayoutId id="2147483680" r:id="rId2"/>
+    <p:sldLayoutId id="2147483681" r:id="rId3"/>
+    <p:sldLayoutId id="2147483682" r:id="rId4"/>
+    <p:sldLayoutId id="2147483683" r:id="rId5"/>
+    <p:sldLayoutId id="2147483684" r:id="rId6"/>
+    <p:sldLayoutId id="2147483685" r:id="rId7"/>
+    <p:sldLayoutId id="2147483686" r:id="rId8"/>
+    <p:sldLayoutId id="2147483687" r:id="rId9"/>
+    <p:sldLayoutId id="2147483688" r:id="rId10"/>
+    <p:sldLayoutId id="2147483689" r:id="rId11"/>
   </p:sldLayoutIdLst>
   <p:txStyles>
     <p:titleStyle>
@@ -3409,28 +3409,30 @@
         </p:nvSpPr>
         <p:spPr>
           <a:xfrm>
-            <a:off x="1524000" y="3763878"/>
-            <a:ext cx="9144000" cy="1655762"/>
+            <a:off x="-804452" y="3763878"/>
+            <a:ext cx="5994144" cy="1478541"/>
           </a:xfrm>
         </p:spPr>
         <p:txBody>
           <a:bodyPr>
-            <a:normAutofit lnSpcReduction="10000"/>
+            <a:normAutofit/>
           </a:bodyPr>
           <a:lstStyle/>
           <a:p>
             <a:r>
-              <a:rPr lang="en-IN" dirty="0"/>
+              <a:rPr lang="en-IN" b="1" dirty="0"/>
               <a:t>Done by:</a:t>
             </a:r>
           </a:p>
           <a:p>
+            <a:pPr lvl="2"/>
             <a:r>
               <a:rPr lang="en-IN" dirty="0"/>
               <a:t>Anuj A</a:t>
             </a:r>
           </a:p>
           <a:p>
+            <a:pPr lvl="2"/>
             <a:r>
               <a:rPr lang="en-IN" dirty="0" err="1"/>
               <a:t>Jei</a:t>
@@ -3441,10 +3443,90 @@
             </a:r>
           </a:p>
           <a:p>
+            <a:pPr lvl="2"/>
             <a:r>
               <a:rPr lang="en-IN" dirty="0"/>
               <a:t>Mithun V R</a:t>
             </a:r>
+            <a:endParaRPr lang="en-SG" dirty="0"/>
+          </a:p>
+        </p:txBody>
+      </p:sp>
+      <p:sp>
+        <p:nvSpPr>
+          <p:cNvPr id="4" name="TextBox 3">
+            <a:extLst>
+              <a:ext uri="{FF2B5EF4-FFF2-40B4-BE49-F238E27FC236}">
+                <a16:creationId xmlns:a16="http://schemas.microsoft.com/office/drawing/2014/main" id="{2A3A3306-9F63-47B0-84D3-C44B700C210B}"/>
+              </a:ext>
+            </a:extLst>
+          </p:cNvPr>
+          <p:cNvSpPr txBox="1"/>
+          <p:nvPr/>
+        </p:nvSpPr>
+        <p:spPr>
+          <a:xfrm>
+            <a:off x="8567442" y="3763878"/>
+            <a:ext cx="2826143" cy="1754326"/>
+          </a:xfrm>
+          <a:prstGeom prst="rect">
+            <a:avLst/>
+          </a:prstGeom>
+          <a:noFill/>
+        </p:spPr>
+        <p:txBody>
+          <a:bodyPr wrap="square" rtlCol="0">
+            <a:spAutoFit/>
+          </a:bodyPr>
+          <a:lstStyle/>
+          <a:p>
+            <a:r>
+              <a:rPr lang="en-GB" b="1" u="sng" dirty="0"/>
+              <a:t>Project </a:t>
+            </a:r>
+            <a:r>
+              <a:rPr lang="en-GB" b="1" u="sng" dirty="0" err="1"/>
+              <a:t>Artifacts</a:t>
+            </a:r>
+            <a:endParaRPr lang="en-GB" u="sng" dirty="0"/>
+          </a:p>
+          <a:p>
+            <a:pPr lvl="1"/>
+            <a:r>
+              <a:rPr lang="en-GB" b="1" dirty="0"/>
+              <a:t>GitHub Repository:</a:t>
+            </a:r>
+            <a:r>
+              <a:rPr lang="en-GB" dirty="0"/>
+              <a:t> </a:t>
+            </a:r>
+            <a:r>
+              <a:rPr lang="en-GB" dirty="0" err="1">
+                <a:hlinkClick r:id="rId2"/>
+              </a:rPr>
+              <a:t>Moles_GIT</a:t>
+            </a:r>
+            <a:endParaRPr lang="en-GB" dirty="0"/>
+          </a:p>
+          <a:p>
+            <a:pPr lvl="1"/>
+            <a:r>
+              <a:rPr lang="en-GB" b="1" dirty="0"/>
+              <a:t>Live Dashboard:</a:t>
+            </a:r>
+            <a:r>
+              <a:rPr lang="en-GB" dirty="0"/>
+              <a:t> </a:t>
+            </a:r>
+            <a:r>
+              <a:rPr lang="en-GB" dirty="0" err="1">
+                <a:hlinkClick r:id="rId3"/>
+              </a:rPr>
+              <a:t>Moles_Dash</a:t>
+            </a:r>
+            <a:endParaRPr lang="en-GB" dirty="0"/>
+          </a:p>
+          <a:p>
             <a:endParaRPr lang="en-SG" dirty="0"/>
           </a:p>
         </p:txBody>
@@ -3510,6 +3592,41 @@
       </p:sp>
       <p:pic>
         <p:nvPicPr>
+          <p:cNvPr id="12" name="Content Placeholder 11">
+            <a:extLst>
+              <a:ext uri="{FF2B5EF4-FFF2-40B4-BE49-F238E27FC236}">
+                <a16:creationId xmlns:a16="http://schemas.microsoft.com/office/drawing/2014/main" id="{D062D62A-5AD0-4502-87C4-918F09B6DD62}"/>
+              </a:ext>
+            </a:extLst>
+          </p:cNvPr>
+          <p:cNvPicPr>
+            <a:picLocks noGrp="1" noChangeAspect="1"/>
+          </p:cNvPicPr>
+          <p:nvPr>
+            <p:ph idx="1"/>
+          </p:nvPr>
+        </p:nvPicPr>
+        <p:blipFill>
+          <a:blip r:embed="rId2">
+            <a:extLst>
+              <a:ext uri="{28A0092B-C50C-407E-A947-70E740481C1C}">
+                <a14:useLocalDpi xmlns:a14="http://schemas.microsoft.com/office/drawing/2010/main" val="0"/>
+              </a:ext>
+            </a:extLst>
+          </a:blip>
+          <a:stretch>
+            <a:fillRect/>
+          </a:stretch>
+        </p:blipFill>
+        <p:spPr>
+          <a:xfrm>
+            <a:off x="1024653" y="1470538"/>
+            <a:ext cx="4562829" cy="2566591"/>
+          </a:xfrm>
+        </p:spPr>
+      </p:pic>
+      <p:pic>
+        <p:nvPicPr>
           <p:cNvPr id="7" name="Picture 6">
             <a:extLst>
               <a:ext uri="{FF2B5EF4-FFF2-40B4-BE49-F238E27FC236}">
@@ -3523,7 +3640,7 @@
           <p:nvPr/>
         </p:nvPicPr>
         <p:blipFill>
-          <a:blip r:embed="rId2">
+          <a:blip r:embed="rId3">
             <a:extLst>
               <a:ext uri="{28A0092B-C50C-407E-A947-70E740481C1C}">
                 <a14:useLocalDpi xmlns:a14="http://schemas.microsoft.com/office/drawing/2010/main" val="0"/>
@@ -3660,41 +3777,6 @@
           </a:p>
         </p:txBody>
       </p:sp>
-      <p:pic>
-        <p:nvPicPr>
-          <p:cNvPr id="12" name="Content Placeholder 11">
-            <a:extLst>
-              <a:ext uri="{FF2B5EF4-FFF2-40B4-BE49-F238E27FC236}">
-                <a16:creationId xmlns:a16="http://schemas.microsoft.com/office/drawing/2014/main" id="{D062D62A-5AD0-4502-87C4-918F09B6DD62}"/>
-              </a:ext>
-            </a:extLst>
-          </p:cNvPr>
-          <p:cNvPicPr>
-            <a:picLocks noGrp="1" noChangeAspect="1"/>
-          </p:cNvPicPr>
-          <p:nvPr>
-            <p:ph idx="1"/>
-          </p:nvPr>
-        </p:nvPicPr>
-        <p:blipFill>
-          <a:blip r:embed="rId3">
-            <a:extLst>
-              <a:ext uri="{28A0092B-C50C-407E-A947-70E740481C1C}">
-                <a14:useLocalDpi xmlns:a14="http://schemas.microsoft.com/office/drawing/2010/main" val="0"/>
-              </a:ext>
-            </a:extLst>
-          </a:blip>
-          <a:stretch>
-            <a:fillRect/>
-          </a:stretch>
-        </p:blipFill>
-        <p:spPr>
-          <a:xfrm>
-            <a:off x="1024653" y="1470538"/>
-            <a:ext cx="4562829" cy="2566591"/>
-          </a:xfrm>
-        </p:spPr>
-      </p:pic>
     </p:spTree>
     <p:extLst>
       <p:ext uri="{BB962C8B-B14F-4D97-AF65-F5344CB8AC3E}">
@@ -4771,7 +4853,7 @@
         </p:nvSpPr>
         <p:spPr>
           <a:xfrm>
-            <a:off x="838200" y="2828835"/>
+            <a:off x="587347" y="87755"/>
             <a:ext cx="10515600" cy="1325563"/>
           </a:xfrm>
         </p:spPr>
@@ -4779,21 +4861,19 @@
           <a:bodyPr/>
           <a:lstStyle/>
           <a:p>
-            <a:pPr algn="ctr"/>
-            <a:r>
-              <a:rPr lang="en-GB" b="1" dirty="0"/>
-              <a:t>Thank You</a:t>
-            </a:r>
-            <a:endParaRPr lang="en-SG" dirty="0"/>
-          </a:p>
-        </p:txBody>
-      </p:sp>
-      <p:sp>
-        <p:nvSpPr>
-          <p:cNvPr id="6" name="TextBox 5">
-            <a:extLst>
-              <a:ext uri="{FF2B5EF4-FFF2-40B4-BE49-F238E27FC236}">
-                <a16:creationId xmlns:a16="http://schemas.microsoft.com/office/drawing/2014/main" id="{C16E8188-A972-4085-BD70-D35E915A723B}"/>
+            <a:r>
+              <a:rPr lang="en-SG" dirty="0"/>
+              <a:t>Conclusion &amp; Project Showcase</a:t>
+            </a:r>
+          </a:p>
+        </p:txBody>
+      </p:sp>
+      <p:sp>
+        <p:nvSpPr>
+          <p:cNvPr id="2" name="TextBox 1">
+            <a:extLst>
+              <a:ext uri="{FF2B5EF4-FFF2-40B4-BE49-F238E27FC236}">
+                <a16:creationId xmlns:a16="http://schemas.microsoft.com/office/drawing/2014/main" id="{611D242F-284C-4DBD-9337-7CB70EF4F7F1}"/>
               </a:ext>
             </a:extLst>
           </p:cNvPr>
@@ -4802,8 +4882,8 @@
         </p:nvSpPr>
         <p:spPr>
           <a:xfrm>
-            <a:off x="838200" y="4907134"/>
-            <a:ext cx="10600566" cy="1200329"/>
+            <a:off x="587348" y="1327093"/>
+            <a:ext cx="11251300" cy="5078313"/>
           </a:xfrm>
           <a:prstGeom prst="rect">
             <a:avLst/>
@@ -4816,51 +4896,148 @@
           </a:bodyPr>
           <a:lstStyle/>
           <a:p>
-            <a:r>
-              <a:rPr lang="en-GB" b="1" u="sng" dirty="0"/>
-              <a:t>Project </a:t>
-            </a:r>
-            <a:r>
-              <a:rPr lang="en-GB" b="1" u="sng" dirty="0" err="1"/>
-              <a:t>Artifacts</a:t>
-            </a:r>
-            <a:endParaRPr lang="en-GB" u="sng" dirty="0"/>
-          </a:p>
-          <a:p>
+            <a:pPr marL="285750" indent="-285750">
+              <a:buFont typeface="Arial" panose="020B0604020202020204" pitchFamily="34" charset="0"/>
+              <a:buChar char="•"/>
+            </a:pPr>
+            <a:r>
+              <a:rPr lang="en-GB" dirty="0"/>
+              <a:t>Our analysis has provided clear, data-driven insights to address core business challenges. By moving from intuition to a strategic, data-led approach, Urban Grocers can unlock its full profitability.</a:t>
+            </a:r>
+          </a:p>
+          <a:p>
+            <a:pPr marL="285750" indent="-285750">
+              <a:buFont typeface="Arial" panose="020B0604020202020204" pitchFamily="34" charset="0"/>
+              <a:buChar char="•"/>
+            </a:pPr>
             <a:r>
               <a:rPr lang="en-GB" b="1" dirty="0"/>
-              <a:t>GitHub Repository:</a:t>
+              <a:t>Key Takeaways:</a:t>
+            </a:r>
+          </a:p>
+          <a:p>
+            <a:pPr marL="742950" lvl="1" indent="-285750">
+              <a:buFont typeface="Arial" panose="020B0604020202020204" pitchFamily="34" charset="0"/>
+              <a:buChar char="•"/>
+            </a:pPr>
+            <a:r>
+              <a:rPr lang="en-GB" b="1" dirty="0"/>
+              <a:t>Overall Volatility is an Opportunity: </a:t>
             </a:r>
             <a:r>
               <a:rPr lang="en-GB" dirty="0"/>
-              <a:t> </a:t>
-            </a:r>
-            <a:r>
-              <a:rPr lang="en-GB" dirty="0" err="1">
-                <a:hlinkClick r:id="rId2"/>
-              </a:rPr>
-              <a:t>Moles_GIT</a:t>
-            </a:r>
-            <a:endParaRPr lang="en-GB" dirty="0"/>
-          </a:p>
-          <a:p>
+              <a:t>By understanding seasonal demand, Urban Grocers can optimize its supply chain and operations.</a:t>
+            </a:r>
+          </a:p>
+          <a:p>
+            <a:pPr marL="742950" lvl="1" indent="-285750">
+              <a:buFont typeface="Arial" panose="020B0604020202020204" pitchFamily="34" charset="0"/>
+              <a:buChar char="•"/>
+            </a:pPr>
             <a:r>
               <a:rPr lang="en-GB" b="1" dirty="0"/>
-              <a:t>Live Dashboard:</a:t>
+              <a:t>Promotions Need a Purpose: </a:t>
             </a:r>
             <a:r>
               <a:rPr lang="en-GB" dirty="0"/>
-              <a:t> </a:t>
-            </a:r>
-            <a:r>
-              <a:rPr lang="en-GB" dirty="0" err="1">
-                <a:hlinkClick r:id="rId3"/>
-              </a:rPr>
-              <a:t>Moles_Dash</a:t>
-            </a:r>
-            <a:endParaRPr lang="en-GB" dirty="0"/>
-          </a:p>
-          <a:p>
+              <a:t>The current "one-size-fits-all" promotion strategy is not working. The future lies in targeted, profit-protecting promotions.</a:t>
+            </a:r>
+          </a:p>
+          <a:p>
+            <a:pPr marL="742950" lvl="1" indent="-285750">
+              <a:buFont typeface="Arial" panose="020B0604020202020204" pitchFamily="34" charset="0"/>
+              <a:buChar char="•"/>
+            </a:pPr>
+            <a:r>
+              <a:rPr lang="en-GB" b="1" dirty="0"/>
+              <a:t>Forecasting is the Roadmap: </a:t>
+            </a:r>
+            <a:r>
+              <a:rPr lang="en-GB" dirty="0"/>
+              <a:t>Predictive analytics offers a clear path to optimizing inventory and making smarter business decisions.</a:t>
+            </a:r>
+          </a:p>
+          <a:p>
+            <a:pPr marL="285750" indent="-285750">
+              <a:buFont typeface="Arial" panose="020B0604020202020204" pitchFamily="34" charset="0"/>
+              <a:buChar char="•"/>
+            </a:pPr>
+            <a:r>
+              <a:rPr lang="en-GB" b="1" dirty="0"/>
+              <a:t>Tools &amp; Methodology:</a:t>
+            </a:r>
+          </a:p>
+          <a:p>
+            <a:pPr marL="742950" lvl="1" indent="-285750">
+              <a:buFont typeface="Arial" panose="020B0604020202020204" pitchFamily="34" charset="0"/>
+              <a:buChar char="•"/>
+            </a:pPr>
+            <a:r>
+              <a:rPr lang="en-GB" b="1" dirty="0"/>
+              <a:t>Tools: </a:t>
+            </a:r>
+            <a:r>
+              <a:rPr lang="en-GB" dirty="0"/>
+              <a:t>The analysis began with data exploration in Altair AI Studio and was further developed using Python in a </a:t>
+            </a:r>
+            <a:r>
+              <a:rPr lang="en-GB" dirty="0" err="1"/>
+              <a:t>Jupyter</a:t>
+            </a:r>
+            <a:r>
+              <a:rPr lang="en-GB" dirty="0"/>
+              <a:t> Notebook environment.</a:t>
+            </a:r>
+          </a:p>
+          <a:p>
+            <a:pPr marL="742950" lvl="1" indent="-285750">
+              <a:buFont typeface="Arial" panose="020B0604020202020204" pitchFamily="34" charset="0"/>
+              <a:buChar char="•"/>
+            </a:pPr>
+            <a:r>
+              <a:rPr lang="en-GB" b="1" dirty="0"/>
+              <a:t>Libraries:</a:t>
+            </a:r>
+            <a:r>
+              <a:rPr lang="en-GB" dirty="0"/>
+              <a:t> Pandas was used for data manipulation, and </a:t>
+            </a:r>
+            <a:r>
+              <a:rPr lang="en-GB" dirty="0" err="1"/>
+              <a:t>Plotly</a:t>
+            </a:r>
+            <a:r>
+              <a:rPr lang="en-GB" dirty="0"/>
+              <a:t> and Dash were used to build the interactive dashboard.</a:t>
+            </a:r>
+          </a:p>
+          <a:p>
+            <a:pPr marL="742950" lvl="1" indent="-285750">
+              <a:buFont typeface="Arial" panose="020B0604020202020204" pitchFamily="34" charset="0"/>
+              <a:buChar char="•"/>
+            </a:pPr>
+            <a:r>
+              <a:rPr lang="en-GB" b="1" dirty="0"/>
+              <a:t>Algorithm:</a:t>
+            </a:r>
+            <a:r>
+              <a:rPr lang="en-GB" dirty="0"/>
+              <a:t> The predictive analysis was powered by the Prophet algorithm, a powerful open-source tool designed for time-series forecasting.</a:t>
+            </a:r>
+          </a:p>
+          <a:p>
+            <a:pPr marL="742950" lvl="1" indent="-285750">
+              <a:buFont typeface="Arial" panose="020B0604020202020204" pitchFamily="34" charset="0"/>
+              <a:buChar char="•"/>
+            </a:pPr>
+            <a:r>
+              <a:rPr lang="en-GB" b="1" dirty="0"/>
+              <a:t>Methodology:</a:t>
+            </a:r>
+            <a:r>
+              <a:rPr lang="en-GB" dirty="0"/>
+              <a:t> We followed a structured approach from descriptive (What is happening?) to predictive (What will happen?).</a:t>
+            </a:r>
             <a:endParaRPr lang="en-SG" dirty="0"/>
           </a:p>
         </p:txBody>
